--- a/sayt/media/resources/2026/10/mehnat-muhofazasi-19-mavzu.pptx
+++ b/sayt/media/resources/2026/10/mehnat-muhofazasi-19-mavzu.pptx
@@ -15977,7 +15977,7 @@
                 </a:solidFill>
                 <a:latin typeface="Georgia"/>
               </a:rPr>
-              <a:t>o‘chirgichlar va himoya o‘chirish qurilmasi (uzo)</a:t>
+              <a:t>o‘chirgichlar va himoya o‘chirish qurilmasi (UZO)</a:t>
             </a:r>
           </a:p>
         </p:txBody>
